--- a/classes/parte-17-profundizacion-para-certificaciones/316-modelos-de-seguridad-y-arquitectura/clase-316-presentacion.pptx
+++ b/classes/parte-17-profundizacion-para-certificaciones/316-modelos-de-seguridad-y-arquitectura/clase-316-presentacion.pptx
@@ -17,6 +17,10 @@
     <p:sldId id="265" r:id="rId16"/>
     <p:sldId id="266" r:id="rId17"/>
     <p:sldId id="267" r:id="rId18"/>
+    <p:sldId id="268" r:id="rId19"/>
+    <p:sldId id="269" r:id="rId20"/>
+    <p:sldId id="270" r:id="rId21"/>
+    <p:sldId id="271" r:id="rId22"/>
   </p:sldIdLst>
   <p:sldSz cx="9144000" cy="6858000" type="screen4x3"/>
   <p:notesSz cx="6858000" cy="9144000"/>
@@ -3198,7 +3202,7 @@
                   <a:srgbClr val="0B3D2E"/>
                 </a:solidFill>
               </a:rPr>
-              <a:t>⚠️ Errores comunes</a:t>
+              <a:t>🧪 Laboratorio guiado — Diseñar una matriz de acceso multinivel</a:t>
             </a:r>
           </a:p>
         </p:txBody>
@@ -3236,67 +3240,97 @@
                   <a:srgbClr val="22282E"/>
                 </a:solidFill>
               </a:rPr>
-              <a:t>•  "Confundo la dirección de BLP y Biba" — Regla mnemónica: BLP protege Confidencialidad → no read up; Biba protege Integridad → no read down. Son duales.</a:t>
-            </a:r>
-          </a:p>
-          <a:p>
-            <a:pPr>
-              <a:spcAft>
-                <a:spcPts val="600"/>
-              </a:spcAft>
-            </a:pPr>
-            <a:r>
-              <a:rPr sz="1500">
-                <a:solidFill>
-                  <a:srgbClr val="22282E"/>
-                </a:solidFill>
-              </a:rPr>
-              <a:t>•  "Creo que BLP protege integridad" — BLP solo protege confidencialidad; permite escribir hacia arriba, lo que degrada integridad. Usa Biba o Clark-Wilson para integridad.</a:t>
-            </a:r>
-          </a:p>
-          <a:p>
-            <a:pPr>
-              <a:spcAft>
-                <a:spcPts val="600"/>
-              </a:spcAft>
-            </a:pPr>
-            <a:r>
-              <a:rPr sz="1500">
-                <a:solidFill>
-                  <a:srgbClr val="22282E"/>
-                </a:solidFill>
-              </a:rPr>
-              <a:t>•  "Aplico Clark-Wilson pero dejo acceso directo a los datos" — El modelo exige acceso solo vía TP certificados; el acceso directo a CDI rompe el modelo.</a:t>
-            </a:r>
-          </a:p>
-          <a:p>
-            <a:pPr>
-              <a:spcAft>
-                <a:spcPts val="600"/>
-              </a:spcAft>
-            </a:pPr>
-            <a:r>
-              <a:rPr sz="1500">
-                <a:solidFill>
-                  <a:srgbClr val="22282E"/>
-                </a:solidFill>
-              </a:rPr>
-              <a:t>•  "Pongo todo el SO dentro de la TCB" — Inflar la TCB la hace inverificable. Minimiza lo confiable; deja fuera lo que no impone política.</a:t>
-            </a:r>
-          </a:p>
-          <a:p>
-            <a:pPr>
-              <a:spcAft>
-                <a:spcPts val="600"/>
-              </a:spcAft>
-            </a:pPr>
-            <a:r>
-              <a:rPr sz="1500">
-                <a:solidFill>
-                  <a:srgbClr val="22282E"/>
-                </a:solidFill>
-              </a:rPr>
-              <a:t>•  "Reetiqueto niveles en caliente sin control" — Viola el principio de tranquilidad; puede crear un canal encubierto. Documenta strong/weak tranquility.</a:t>
+              <a:t>•  Ejercicio aplicado: modelarás un sistema de gestión documental de una agencia con cuatro niveles de sensibilidad y verificarás que cumple Bell-LaPadula.</a:t>
+            </a:r>
+          </a:p>
+          <a:p>
+            <a:pPr>
+              <a:spcAft>
+                <a:spcPts val="600"/>
+              </a:spcAft>
+            </a:pPr>
+            <a:r>
+              <a:rPr sz="1500">
+                <a:solidFill>
+                  <a:srgbClr val="22282E"/>
+                </a:solidFill>
+              </a:rPr>
+              <a:t>•  Define el retículo de niveles. De menor a mayor: Público &lt; Interno &lt; Confidencial &lt; Secreto. Documenta la relación de dominancia (cada nivel domina a los inferiores).</a:t>
+            </a:r>
+          </a:p>
+          <a:p>
+            <a:pPr>
+              <a:spcAft>
+                <a:spcPts val="600"/>
+              </a:spcAft>
+            </a:pPr>
+            <a:r>
+              <a:rPr sz="1500">
+                <a:solidFill>
+                  <a:srgbClr val="22282E"/>
+                </a:solidFill>
+              </a:rPr>
+              <a:t>•  Define sujetos y su clearance. Ejemplo: Ana=Secreto, Beto=Confidencial, Carla=Interno, ServicioWeb=Público.</a:t>
+            </a:r>
+          </a:p>
+          <a:p>
+            <a:pPr>
+              <a:spcAft>
+                <a:spcPts val="600"/>
+              </a:spcAft>
+            </a:pPr>
+            <a:r>
+              <a:rPr sz="1500">
+                <a:solidFill>
+                  <a:srgbClr val="22282E"/>
+                </a:solidFill>
+              </a:rPr>
+              <a:t>•  Define objetos y su clasificación. planestrategico=Secreto, informefinanzas=Confidencial, manualrrhh=Interno, webcorp=Público.</a:t>
+            </a:r>
+          </a:p>
+          <a:p>
+            <a:pPr>
+              <a:spcAft>
+                <a:spcPts val="600"/>
+              </a:spcAft>
+            </a:pPr>
+            <a:r>
+              <a:rPr sz="1500">
+                <a:solidFill>
+                  <a:srgbClr val="22282E"/>
+                </a:solidFill>
+              </a:rPr>
+              <a:t>•  Aplica ss-property (no read up). Construye la matriz de lectura: marca ✔ solo si clearance(sujeto) ≥ clasificacion(objeto). Verifica que Beto NO puede leer planestrategico.</a:t>
+            </a:r>
+          </a:p>
+          <a:p>
+            <a:pPr>
+              <a:spcAft>
+                <a:spcPts val="600"/>
+              </a:spcAft>
+            </a:pPr>
+            <a:r>
+              <a:rPr sz="1500">
+                <a:solidFill>
+                  <a:srgbClr val="22282E"/>
+                </a:solidFill>
+              </a:rPr>
+              <a:t>•  Aplica \-property (no write down). Construye la matriz de escritura: marca ✔ solo si clearance(sujeto) ≤ clasificacion(objeto). Verifica que Ana (Secreto) NO puede escribir en webcorp (Público)…</a:t>
+            </a:r>
+          </a:p>
+          <a:p>
+            <a:pPr>
+              <a:spcAft>
+                <a:spcPts val="600"/>
+              </a:spcAft>
+            </a:pPr>
+            <a:r>
+              <a:rPr sz="1500">
+                <a:solidFill>
+                  <a:srgbClr val="22282E"/>
+                </a:solidFill>
+              </a:rPr>
+              <a:t>•  Identifica el "tranquility principle". Anota qué pasa si Beto es promovido a Secreto a mitad de sesión (strong vs weak tranquility) y por qué reetiquetar en caliente es riesgoso.</a:t>
             </a:r>
           </a:p>
         </p:txBody>
@@ -3347,7 +3381,7 @@
                   <a:srgbClr val="0B3D2E"/>
                 </a:solidFill>
               </a:rPr>
-              <a:t>❓ Preguntas frecuentes</a:t>
+              <a:t>✍️ Ejercicios</a:t>
             </a:r>
           </a:p>
         </p:txBody>
@@ -3385,97 +3419,82 @@
                   <a:srgbClr val="22282E"/>
                 </a:solidFill>
               </a:rPr>
-              <a:t>•  ❓ ¿Por qué BLP permite "escribir arriba" (blind write)?</a:t>
-            </a:r>
-          </a:p>
-          <a:p>
-            <a:pPr>
-              <a:spcAft>
-                <a:spcPts val="600"/>
-              </a:spcAft>
-            </a:pPr>
-            <a:r>
-              <a:rPr sz="1500">
-                <a:solidFill>
-                  <a:srgbClr val="22282E"/>
-                </a:solidFill>
-              </a:rPr>
-              <a:t>•  Porque su único objetivo es la confidencialidad: escribir a un nivel superior no revela secretos hacia abajo. El problema es que puede corromper datos de mayor sensibilidad, por eso BLP no sirve para integridad.</a:t>
-            </a:r>
-          </a:p>
-          <a:p>
-            <a:pPr>
-              <a:spcAft>
-                <a:spcPts val="600"/>
-              </a:spcAft>
-            </a:pPr>
-            <a:r>
-              <a:rPr sz="1500">
-                <a:solidFill>
-                  <a:srgbClr val="22282E"/>
-                </a:solidFill>
-              </a:rPr>
-              <a:t>•  ❓ ¿Clark-Wilson reemplaza a Biba?</a:t>
-            </a:r>
-          </a:p>
-          <a:p>
-            <a:pPr>
-              <a:spcAft>
-                <a:spcPts val="600"/>
-              </a:spcAft>
-            </a:pPr>
-            <a:r>
-              <a:rPr sz="1500">
-                <a:solidFill>
-                  <a:srgbClr val="22282E"/>
-                </a:solidFill>
-              </a:rPr>
-              <a:t>•  No exactamente. Biba es un modelo de retícula orientado a flujo de información; Clark-Wilson es un modelo aplicado y práctico para entornos comerciales que añade transacciones bien formadas y separación de deberes. En certificación se citan como complementarios.</a:t>
-            </a:r>
-          </a:p>
-          <a:p>
-            <a:pPr>
-              <a:spcAft>
-                <a:spcPts val="600"/>
-              </a:spcAft>
-            </a:pPr>
-            <a:r>
-              <a:rPr sz="1500">
-                <a:solidFill>
-                  <a:srgbClr val="22282E"/>
-                </a:solidFill>
-              </a:rPr>
-              <a:t>•  ❓ ¿Dónde veo estos modelos en tecnología real?</a:t>
-            </a:r>
-          </a:p>
-          <a:p>
-            <a:pPr>
-              <a:spcAft>
-                <a:spcPts val="600"/>
-              </a:spcAft>
-            </a:pPr>
-            <a:r>
-              <a:rPr sz="1500">
-                <a:solidFill>
-                  <a:srgbClr val="22282E"/>
-                </a:solidFill>
-              </a:rPr>
-              <a:t>•  SELinux y AppArmor implementan MAC inspirado en BLP/Biba mediante etiquetas de tipo; los hipervisores y TPM materializan la idea de TCB; los anillos 0–3 de x86 y los modos EL0–EL3 de ARM implementan anillos de protección.</a:t>
-            </a:r>
-          </a:p>
-          <a:p>
-            <a:pPr>
-              <a:spcAft>
-                <a:spcPts val="600"/>
-              </a:spcAft>
-            </a:pPr>
-            <a:r>
-              <a:rPr sz="1500">
-                <a:solidFill>
-                  <a:srgbClr val="22282E"/>
-                </a:solidFill>
-              </a:rPr>
-              <a:t>•  ❓ ¿Qué diferencia hay entre monitor de referencia y kernel de seguridad?</a:t>
+              <a:t>•  Dibuja el retículo de niveles de una empresa con las categorías TLP:CLEAR/GREEN/AMBER/RED y clasifica 5 documentos reales de tu organización.</a:t>
+            </a:r>
+          </a:p>
+          <a:p>
+            <a:pPr>
+              <a:spcAft>
+                <a:spcPts val="600"/>
+              </a:spcAft>
+            </a:pPr>
+            <a:r>
+              <a:rPr sz="1500">
+                <a:solidFill>
+                  <a:srgbClr val="22282E"/>
+                </a:solidFill>
+              </a:rPr>
+              <a:t>•  Dado un sujeto Confidencial y un objeto Secreto, indica qué operaciones permite BLP y cuáles Biba, y explica la diferencia.</a:t>
+            </a:r>
+          </a:p>
+          <a:p>
+            <a:pPr>
+              <a:spcAft>
+                <a:spcPts val="600"/>
+              </a:spcAft>
+            </a:pPr>
+            <a:r>
+              <a:rPr sz="1500">
+                <a:solidFill>
+                  <a:srgbClr val="22282E"/>
+                </a:solidFill>
+              </a:rPr>
+              <a:t>•  Modela con Clark-Wilson un flujo de "solicitud → aprobación → pago" identificando CDI, UDI, TP e IVP.</a:t>
+            </a:r>
+          </a:p>
+          <a:p>
+            <a:pPr>
+              <a:spcAft>
+                <a:spcPts val="600"/>
+              </a:spcAft>
+            </a:pPr>
+            <a:r>
+              <a:rPr sz="1500">
+                <a:solidFill>
+                  <a:srgbClr val="22282E"/>
+                </a:solidFill>
+              </a:rPr>
+              <a:t>•  Explica con un caso de consultoría por qué Brewer-Nash es dinámico y BLP estático.</a:t>
+            </a:r>
+          </a:p>
+          <a:p>
+            <a:pPr>
+              <a:spcAft>
+                <a:spcPts val="600"/>
+              </a:spcAft>
+            </a:pPr>
+            <a:r>
+              <a:rPr sz="1500">
+                <a:solidFill>
+                  <a:srgbClr val="22282E"/>
+                </a:solidFill>
+              </a:rPr>
+              <a:t>•  Enumera las tres propiedades del monitor de referencia y da un ejemplo de fallo real por incumplir cada una.</a:t>
+            </a:r>
+          </a:p>
+          <a:p>
+            <a:pPr>
+              <a:spcAft>
+                <a:spcPts val="600"/>
+              </a:spcAft>
+            </a:pPr>
+            <a:r>
+              <a:rPr sz="1500">
+                <a:solidFill>
+                  <a:srgbClr val="22282E"/>
+                </a:solidFill>
+              </a:rPr>
+              <a:t>•  Argumenta por qué reducir la TCB mejora la verificabilidad, usando el kernel monolítico vs microkernel como ejemplo.</a:t>
             </a:r>
           </a:p>
         </p:txBody>
@@ -3526,7 +3545,7 @@
                   <a:srgbClr val="0B3D2E"/>
                 </a:solidFill>
               </a:rPr>
-              <a:t>🔗 Referencias</a:t>
+              <a:t>📝 Reto verificable</a:t>
             </a:r>
           </a:p>
         </p:txBody>
@@ -3564,6 +3583,498 @@
                   <a:srgbClr val="22282E"/>
                 </a:solidFill>
               </a:rPr>
+              <a:t>•  Reto: entrega una matriz de acceso multinivel (lectura + escritura) para un sistema de 4 niveles y 4 sujetos que cumpla Bell-LaPadula, más una segunda versión Biba del mismo sistema.</a:t>
+            </a:r>
+          </a:p>
+          <a:p>
+            <a:pPr>
+              <a:spcAft>
+                <a:spcPts val="600"/>
+              </a:spcAft>
+            </a:pPr>
+            <a:r>
+              <a:rPr sz="1500">
+                <a:solidFill>
+                  <a:srgbClr val="22282E"/>
+                </a:solidFill>
+              </a:rPr>
+              <a:t>•  Criterio de aceptación:</a:t>
+            </a:r>
+          </a:p>
+          <a:p>
+            <a:pPr>
+              <a:spcAft>
+                <a:spcPts val="600"/>
+              </a:spcAft>
+            </a:pPr>
+            <a:r>
+              <a:rPr sz="1500">
+                <a:solidFill>
+                  <a:srgbClr val="22282E"/>
+                </a:solidFill>
+              </a:rPr>
+              <a:t>•  Ninguna celda de lectura viola no read up y ninguna de escritura viola no write down en la versión BLP.</a:t>
+            </a:r>
+          </a:p>
+          <a:p>
+            <a:pPr>
+              <a:spcAft>
+                <a:spcPts val="600"/>
+              </a:spcAft>
+            </a:pPr>
+            <a:r>
+              <a:rPr sz="1500">
+                <a:solidFill>
+                  <a:srgbClr val="22282E"/>
+                </a:solidFill>
+              </a:rPr>
+              <a:t>•  La versión Biba invierte correctamente ambas reglas.</a:t>
+            </a:r>
+          </a:p>
+          <a:p>
+            <a:pPr>
+              <a:spcAft>
+                <a:spcPts val="600"/>
+              </a:spcAft>
+            </a:pPr>
+            <a:r>
+              <a:rPr sz="1500">
+                <a:solidFill>
+                  <a:srgbClr val="22282E"/>
+                </a:solidFill>
+              </a:rPr>
+              <a:t>•  Se identifica explícitamente qué propiedad de seguridad protege cada versión.</a:t>
+            </a:r>
+          </a:p>
+          <a:p>
+            <a:pPr>
+              <a:spcAft>
+                <a:spcPts val="600"/>
+              </a:spcAft>
+            </a:pPr>
+            <a:r>
+              <a:rPr sz="1500">
+                <a:solidFill>
+                  <a:srgbClr val="22282E"/>
+                </a:solidFill>
+              </a:rPr>
+              <a:t>•  Incluye al menos un TP con separación de deberes documentada (Clark-Wilson).</a:t>
+            </a:r>
+          </a:p>
+        </p:txBody>
+      </p:sp>
+    </p:spTree>
+  </p:cSld>
+  <p:clrMapOvr>
+    <a:masterClrMapping/>
+  </p:clrMapOvr>
+</p:sld>
+</file>
+
+<file path=ppt/slides/slide13.xml><?xml version="1.0" encoding="utf-8"?>
+<p:sld xmlns:a="http://schemas.openxmlformats.org/drawingml/2006/main" xmlns:p="http://schemas.openxmlformats.org/presentationml/2006/main" xmlns:r="http://schemas.openxmlformats.org/officeDocument/2006/relationships">
+  <p:cSld>
+    <p:spTree>
+      <p:nvGrpSpPr>
+        <p:cNvPr id="1" name=""/>
+        <p:cNvGrpSpPr/>
+        <p:nvPr/>
+      </p:nvGrpSpPr>
+      <p:grpSpPr/>
+      <p:sp>
+        <p:nvSpPr>
+          <p:cNvPr id="2" name="TextBox 1"/>
+          <p:cNvSpPr txBox="1"/>
+          <p:nvPr/>
+        </p:nvSpPr>
+        <p:spPr>
+          <a:xfrm>
+            <a:off x="457200" y="320040"/>
+            <a:ext cx="8229600" cy="822960"/>
+          </a:xfrm>
+          <a:prstGeom prst="rect">
+            <a:avLst/>
+          </a:prstGeom>
+          <a:noFill/>
+        </p:spPr>
+        <p:txBody>
+          <a:bodyPr wrap="square">
+            <a:spAutoFit/>
+          </a:bodyPr>
+          <a:lstStyle/>
+          <a:p>
+            <a:r>
+              <a:rPr sz="2600" b="1">
+                <a:solidFill>
+                  <a:srgbClr val="0B3D2E"/>
+                </a:solidFill>
+              </a:rPr>
+              <a:t>⚠️ Errores comunes</a:t>
+            </a:r>
+          </a:p>
+        </p:txBody>
+      </p:sp>
+      <p:sp>
+        <p:nvSpPr>
+          <p:cNvPr id="3" name="TextBox 2"/>
+          <p:cNvSpPr txBox="1"/>
+          <p:nvPr/>
+        </p:nvSpPr>
+        <p:spPr>
+          <a:xfrm>
+            <a:off x="457200" y="1280160"/>
+            <a:ext cx="8229600" cy="4937760"/>
+          </a:xfrm>
+          <a:prstGeom prst="rect">
+            <a:avLst/>
+          </a:prstGeom>
+          <a:noFill/>
+        </p:spPr>
+        <p:txBody>
+          <a:bodyPr wrap="square">
+            <a:spAutoFit/>
+          </a:bodyPr>
+          <a:lstStyle/>
+          <a:p>
+            <a:pPr>
+              <a:spcAft>
+                <a:spcPts val="600"/>
+              </a:spcAft>
+            </a:pPr>
+            <a:r>
+              <a:rPr sz="1500">
+                <a:solidFill>
+                  <a:srgbClr val="22282E"/>
+                </a:solidFill>
+              </a:rPr>
+              <a:t>•  "Confundo la dirección de BLP y Biba" — Regla mnemónica: BLP protege Confidencialidad → no read up; Biba protege Integridad → no read down. Son duales.</a:t>
+            </a:r>
+          </a:p>
+          <a:p>
+            <a:pPr>
+              <a:spcAft>
+                <a:spcPts val="600"/>
+              </a:spcAft>
+            </a:pPr>
+            <a:r>
+              <a:rPr sz="1500">
+                <a:solidFill>
+                  <a:srgbClr val="22282E"/>
+                </a:solidFill>
+              </a:rPr>
+              <a:t>•  "Creo que BLP protege integridad" — BLP solo protege confidencialidad; permite escribir hacia arriba, lo que degrada integridad. Usa Biba o Clark-Wilson para integridad.</a:t>
+            </a:r>
+          </a:p>
+          <a:p>
+            <a:pPr>
+              <a:spcAft>
+                <a:spcPts val="600"/>
+              </a:spcAft>
+            </a:pPr>
+            <a:r>
+              <a:rPr sz="1500">
+                <a:solidFill>
+                  <a:srgbClr val="22282E"/>
+                </a:solidFill>
+              </a:rPr>
+              <a:t>•  "Aplico Clark-Wilson pero dejo acceso directo a los datos" — El modelo exige acceso solo vía TP certificados; el acceso directo a CDI rompe el modelo.</a:t>
+            </a:r>
+          </a:p>
+          <a:p>
+            <a:pPr>
+              <a:spcAft>
+                <a:spcPts val="600"/>
+              </a:spcAft>
+            </a:pPr>
+            <a:r>
+              <a:rPr sz="1500">
+                <a:solidFill>
+                  <a:srgbClr val="22282E"/>
+                </a:solidFill>
+              </a:rPr>
+              <a:t>•  "Pongo todo el SO dentro de la TCB" — Inflar la TCB la hace inverificable. Minimiza lo confiable; deja fuera lo que no impone política.</a:t>
+            </a:r>
+          </a:p>
+          <a:p>
+            <a:pPr>
+              <a:spcAft>
+                <a:spcPts val="600"/>
+              </a:spcAft>
+            </a:pPr>
+            <a:r>
+              <a:rPr sz="1500">
+                <a:solidFill>
+                  <a:srgbClr val="22282E"/>
+                </a:solidFill>
+              </a:rPr>
+              <a:t>•  "Reetiqueto niveles en caliente sin control" — Viola el principio de tranquilidad; puede crear un canal encubierto. Documenta strong/weak tranquility.</a:t>
+            </a:r>
+          </a:p>
+        </p:txBody>
+      </p:sp>
+    </p:spTree>
+  </p:cSld>
+  <p:clrMapOvr>
+    <a:masterClrMapping/>
+  </p:clrMapOvr>
+</p:sld>
+</file>
+
+<file path=ppt/slides/slide14.xml><?xml version="1.0" encoding="utf-8"?>
+<p:sld xmlns:a="http://schemas.openxmlformats.org/drawingml/2006/main" xmlns:p="http://schemas.openxmlformats.org/presentationml/2006/main" xmlns:r="http://schemas.openxmlformats.org/officeDocument/2006/relationships">
+  <p:cSld>
+    <p:spTree>
+      <p:nvGrpSpPr>
+        <p:cNvPr id="1" name=""/>
+        <p:cNvGrpSpPr/>
+        <p:nvPr/>
+      </p:nvGrpSpPr>
+      <p:grpSpPr/>
+      <p:sp>
+        <p:nvSpPr>
+          <p:cNvPr id="2" name="TextBox 1"/>
+          <p:cNvSpPr txBox="1"/>
+          <p:nvPr/>
+        </p:nvSpPr>
+        <p:spPr>
+          <a:xfrm>
+            <a:off x="457200" y="320040"/>
+            <a:ext cx="8229600" cy="822960"/>
+          </a:xfrm>
+          <a:prstGeom prst="rect">
+            <a:avLst/>
+          </a:prstGeom>
+          <a:noFill/>
+        </p:spPr>
+        <p:txBody>
+          <a:bodyPr wrap="square">
+            <a:spAutoFit/>
+          </a:bodyPr>
+          <a:lstStyle/>
+          <a:p>
+            <a:r>
+              <a:rPr sz="2600" b="1">
+                <a:solidFill>
+                  <a:srgbClr val="0B3D2E"/>
+                </a:solidFill>
+              </a:rPr>
+              <a:t>❓ Preguntas frecuentes</a:t>
+            </a:r>
+          </a:p>
+        </p:txBody>
+      </p:sp>
+      <p:sp>
+        <p:nvSpPr>
+          <p:cNvPr id="3" name="TextBox 2"/>
+          <p:cNvSpPr txBox="1"/>
+          <p:nvPr/>
+        </p:nvSpPr>
+        <p:spPr>
+          <a:xfrm>
+            <a:off x="457200" y="1280160"/>
+            <a:ext cx="8229600" cy="4937760"/>
+          </a:xfrm>
+          <a:prstGeom prst="rect">
+            <a:avLst/>
+          </a:prstGeom>
+          <a:noFill/>
+        </p:spPr>
+        <p:txBody>
+          <a:bodyPr wrap="square">
+            <a:spAutoFit/>
+          </a:bodyPr>
+          <a:lstStyle/>
+          <a:p>
+            <a:pPr>
+              <a:spcAft>
+                <a:spcPts val="600"/>
+              </a:spcAft>
+            </a:pPr>
+            <a:r>
+              <a:rPr sz="1500">
+                <a:solidFill>
+                  <a:srgbClr val="22282E"/>
+                </a:solidFill>
+              </a:rPr>
+              <a:t>•  ❓ ¿Por qué BLP permite "escribir arriba" (blind write)?</a:t>
+            </a:r>
+          </a:p>
+          <a:p>
+            <a:pPr>
+              <a:spcAft>
+                <a:spcPts val="600"/>
+              </a:spcAft>
+            </a:pPr>
+            <a:r>
+              <a:rPr sz="1500">
+                <a:solidFill>
+                  <a:srgbClr val="22282E"/>
+                </a:solidFill>
+              </a:rPr>
+              <a:t>•  Porque su único objetivo es la confidencialidad: escribir a un nivel superior no revela secretos hacia abajo. El problema es que puede corromper datos de mayor sensibilidad, por eso BLP no sirve para…</a:t>
+            </a:r>
+          </a:p>
+          <a:p>
+            <a:pPr>
+              <a:spcAft>
+                <a:spcPts val="600"/>
+              </a:spcAft>
+            </a:pPr>
+            <a:r>
+              <a:rPr sz="1500">
+                <a:solidFill>
+                  <a:srgbClr val="22282E"/>
+                </a:solidFill>
+              </a:rPr>
+              <a:t>•  ❓ ¿Clark-Wilson reemplaza a Biba?</a:t>
+            </a:r>
+          </a:p>
+          <a:p>
+            <a:pPr>
+              <a:spcAft>
+                <a:spcPts val="600"/>
+              </a:spcAft>
+            </a:pPr>
+            <a:r>
+              <a:rPr sz="1500">
+                <a:solidFill>
+                  <a:srgbClr val="22282E"/>
+                </a:solidFill>
+              </a:rPr>
+              <a:t>•  No exactamente. Biba es un modelo de retícula orientado a flujo de información; Clark-Wilson es un modelo aplicado y práctico para entornos comerciales que añade transacciones bien formadas y…</a:t>
+            </a:r>
+          </a:p>
+          <a:p>
+            <a:pPr>
+              <a:spcAft>
+                <a:spcPts val="600"/>
+              </a:spcAft>
+            </a:pPr>
+            <a:r>
+              <a:rPr sz="1500">
+                <a:solidFill>
+                  <a:srgbClr val="22282E"/>
+                </a:solidFill>
+              </a:rPr>
+              <a:t>•  ❓ ¿Dónde veo estos modelos en tecnología real?</a:t>
+            </a:r>
+          </a:p>
+          <a:p>
+            <a:pPr>
+              <a:spcAft>
+                <a:spcPts val="600"/>
+              </a:spcAft>
+            </a:pPr>
+            <a:r>
+              <a:rPr sz="1500">
+                <a:solidFill>
+                  <a:srgbClr val="22282E"/>
+                </a:solidFill>
+              </a:rPr>
+              <a:t>•  SELinux y AppArmor implementan MAC inspirado en BLP/Biba mediante etiquetas de tipo; los hipervisores y TPM materializan la idea de TCB; los anillos 0–3 de x86 y los modos EL0–EL3 de ARM implementan…</a:t>
+            </a:r>
+          </a:p>
+          <a:p>
+            <a:pPr>
+              <a:spcAft>
+                <a:spcPts val="600"/>
+              </a:spcAft>
+            </a:pPr>
+            <a:r>
+              <a:rPr sz="1500">
+                <a:solidFill>
+                  <a:srgbClr val="22282E"/>
+                </a:solidFill>
+              </a:rPr>
+              <a:t>•  ❓ ¿Qué diferencia hay entre monitor de referencia y kernel de seguridad?</a:t>
+            </a:r>
+          </a:p>
+        </p:txBody>
+      </p:sp>
+    </p:spTree>
+  </p:cSld>
+  <p:clrMapOvr>
+    <a:masterClrMapping/>
+  </p:clrMapOvr>
+</p:sld>
+</file>
+
+<file path=ppt/slides/slide15.xml><?xml version="1.0" encoding="utf-8"?>
+<p:sld xmlns:a="http://schemas.openxmlformats.org/drawingml/2006/main" xmlns:p="http://schemas.openxmlformats.org/presentationml/2006/main" xmlns:r="http://schemas.openxmlformats.org/officeDocument/2006/relationships">
+  <p:cSld>
+    <p:spTree>
+      <p:nvGrpSpPr>
+        <p:cNvPr id="1" name=""/>
+        <p:cNvGrpSpPr/>
+        <p:nvPr/>
+      </p:nvGrpSpPr>
+      <p:grpSpPr/>
+      <p:sp>
+        <p:nvSpPr>
+          <p:cNvPr id="2" name="TextBox 1"/>
+          <p:cNvSpPr txBox="1"/>
+          <p:nvPr/>
+        </p:nvSpPr>
+        <p:spPr>
+          <a:xfrm>
+            <a:off x="457200" y="320040"/>
+            <a:ext cx="8229600" cy="822960"/>
+          </a:xfrm>
+          <a:prstGeom prst="rect">
+            <a:avLst/>
+          </a:prstGeom>
+          <a:noFill/>
+        </p:spPr>
+        <p:txBody>
+          <a:bodyPr wrap="square">
+            <a:spAutoFit/>
+          </a:bodyPr>
+          <a:lstStyle/>
+          <a:p>
+            <a:r>
+              <a:rPr sz="2600" b="1">
+                <a:solidFill>
+                  <a:srgbClr val="0B3D2E"/>
+                </a:solidFill>
+              </a:rPr>
+              <a:t>🔗 Referencias</a:t>
+            </a:r>
+          </a:p>
+        </p:txBody>
+      </p:sp>
+      <p:sp>
+        <p:nvSpPr>
+          <p:cNvPr id="3" name="TextBox 2"/>
+          <p:cNvSpPr txBox="1"/>
+          <p:nvPr/>
+        </p:nvSpPr>
+        <p:spPr>
+          <a:xfrm>
+            <a:off x="457200" y="1280160"/>
+            <a:ext cx="8229600" cy="4937760"/>
+          </a:xfrm>
+          <a:prstGeom prst="rect">
+            <a:avLst/>
+          </a:prstGeom>
+          <a:noFill/>
+        </p:spPr>
+        <p:txBody>
+          <a:bodyPr wrap="square">
+            <a:spAutoFit/>
+          </a:bodyPr>
+          <a:lstStyle/>
+          <a:p>
+            <a:pPr>
+              <a:spcAft>
+                <a:spcPts val="600"/>
+              </a:spcAft>
+            </a:pPr>
+            <a:r>
+              <a:rPr sz="1500">
+                <a:solidFill>
+                  <a:srgbClr val="22282E"/>
+                </a:solidFill>
+              </a:rPr>
               <a:t>•  Chapple, Stewart &amp; Gibson. (ISC)² CISSP Official Study Guide, 9.ª ed., Sybex — Dominio 3.</a:t>
             </a:r>
           </a:p>
@@ -3629,6 +4140,81 @@
           </a:p>
         </p:txBody>
       </p:sp>
+    </p:spTree>
+  </p:cSld>
+  <p:clrMapOvr>
+    <a:masterClrMapping/>
+  </p:clrMapOvr>
+</p:sld>
+</file>
+
+<file path=ppt/slides/slide16.xml><?xml version="1.0" encoding="utf-8"?>
+<p:sld xmlns:a="http://schemas.openxmlformats.org/drawingml/2006/main" xmlns:p="http://schemas.openxmlformats.org/presentationml/2006/main" xmlns:r="http://schemas.openxmlformats.org/officeDocument/2006/relationships">
+  <p:cSld>
+    <p:spTree>
+      <p:nvGrpSpPr>
+        <p:cNvPr id="1" name=""/>
+        <p:cNvGrpSpPr/>
+        <p:nvPr/>
+      </p:nvGrpSpPr>
+      <p:grpSpPr/>
+      <p:sp>
+        <p:nvSpPr>
+          <p:cNvPr id="2" name="TextBox 1"/>
+          <p:cNvSpPr txBox="1"/>
+          <p:nvPr/>
+        </p:nvSpPr>
+        <p:spPr>
+          <a:xfrm>
+            <a:off x="457200" y="274320"/>
+            <a:ext cx="8229600" cy="640080"/>
+          </a:xfrm>
+          <a:prstGeom prst="rect">
+            <a:avLst/>
+          </a:prstGeom>
+          <a:noFill/>
+        </p:spPr>
+        <p:txBody>
+          <a:bodyPr wrap="square">
+            <a:spAutoFit/>
+          </a:bodyPr>
+          <a:lstStyle/>
+          <a:p>
+            <a:r>
+              <a:rPr sz="2200" b="1">
+                <a:solidFill>
+                  <a:srgbClr val="0B3D2E"/>
+                </a:solidFill>
+              </a:rPr>
+              <a:t>Diagrama de la clase</a:t>
+            </a:r>
+          </a:p>
+        </p:txBody>
+      </p:sp>
+      <p:pic>
+        <p:nvPicPr>
+          <p:cNvPr id="3" name="Picture 2" descr="8372b3990f48ac4d.png"/>
+          <p:cNvPicPr>
+            <a:picLocks noChangeAspect="1"/>
+          </p:cNvPicPr>
+          <p:nvPr/>
+        </p:nvPicPr>
+        <p:blipFill>
+          <a:blip r:embed="rId2"/>
+          <a:stretch>
+            <a:fillRect/>
+          </a:stretch>
+        </p:blipFill>
+        <p:spPr>
+          <a:xfrm>
+            <a:off x="457200" y="3317848"/>
+            <a:ext cx="8229599" cy="862383"/>
+          </a:xfrm>
+          <a:prstGeom prst="rect">
+            <a:avLst/>
+          </a:prstGeom>
+        </p:spPr>
+      </p:pic>
     </p:spTree>
   </p:cSld>
   <p:clrMapOvr>
@@ -3713,7 +4299,7 @@
                   <a:srgbClr val="22282E"/>
                 </a:solidFill>
               </a:rPr>
-              <a:t>•  Entender los modelos formales de seguridad que fundamentan la arquitectura de sistemas confiables y traducir sus propiedades (confidencialidad, integridad, separación) a decisiones de diseño reales. Al terminar sabrás distinguir cuándo aplica Bell-LaPadula, Biba, Clark-Wilson o Brewer-Nash, y cómo se relacionan con conceptos de arquitectura como TCB, anillos de protección y el monitor de referencia —material central del dominio de Security Architecture and Engineering de CISSP.</a:t>
+              <a:t>•  Entender los modelos formales de seguridad que fundamentan la arquitectura de sistemas confiables y traducir sus propiedades (confidencialidad, integridad, separación) a decisiones de diseño reales.…</a:t>
             </a:r>
           </a:p>
         </p:txBody>
@@ -4107,7 +4693,7 @@
                   <a:srgbClr val="0B3D2E"/>
                 </a:solidFill>
               </a:rPr>
-              <a:t>📖 Definiciones y características</a:t>
+              <a:t>🧠 Modelo mental y caso de decisión</a:t>
             </a:r>
           </a:p>
         </p:txBody>
@@ -4145,97 +4731,22 @@
                   <a:srgbClr val="22282E"/>
                 </a:solidFill>
               </a:rPr>
-              <a:t>•  Modelo de máquina de estados (state machine model): representa el sistema como estados y transiciones; es seguro si siempre parte de un estado seguro y toda transición conduce a otro estado seguro. Característica clave: fundamento matemático de BLP y Biba.</a:t>
-            </a:r>
-          </a:p>
-          <a:p>
-            <a:pPr>
-              <a:spcAft>
-                <a:spcPts val="600"/>
-              </a:spcAft>
-            </a:pPr>
-            <a:r>
-              <a:rPr sz="1500">
-                <a:solidFill>
-                  <a:srgbClr val="22282E"/>
-                </a:solidFill>
-              </a:rPr>
-              <a:t>•  Bell-LaPadula: modelo de confidencialidad con etiquetas de sensibilidad. Propiedad de seguridad simple (ss): un sujeto no puede leer un objeto de nivel superior (no read up). Propiedad estrella (\): un sujeto no puede escribir a un nivel inferior (no write down). Propiedad discrecional (ds): el acceso también respeta una matriz de acceso. Característica clave: protege secretos, no la integridad.</a:t>
-            </a:r>
-          </a:p>
-          <a:p>
-            <a:pPr>
-              <a:spcAft>
-                <a:spcPts val="600"/>
-              </a:spcAft>
-            </a:pPr>
-            <a:r>
-              <a:rPr sz="1500">
-                <a:solidFill>
-                  <a:srgbClr val="22282E"/>
-                </a:solidFill>
-              </a:rPr>
-              <a:t>•  Biba: modelo de integridad, dual de BLP. Simple integrity: no read down (no leer de nivel de integridad menor). \ integrity: no write up (no escribir a nivel mayor). Característica clave: evita contaminación de datos confiables por fuentes no confiables.</a:t>
-            </a:r>
-          </a:p>
-          <a:p>
-            <a:pPr>
-              <a:spcAft>
-                <a:spcPts val="600"/>
-              </a:spcAft>
-            </a:pPr>
-            <a:r>
-              <a:rPr sz="1500">
-                <a:solidFill>
-                  <a:srgbClr val="22282E"/>
-                </a:solidFill>
-              </a:rPr>
-              <a:t>•  Clark-Wilson: integridad comercial mediante transacciones bien formadas. Usa CDI (Constrained Data Items), UDI (Unconstrained Data Items), TP (Transformation Procedures) e IVP (Integrity Verification Procedures). Impone que los usuarios accedan a los datos solo a través de programas certificados. Característica clave: triple sujeto-programa-objeto y separación de deberes.</a:t>
-            </a:r>
-          </a:p>
-          <a:p>
-            <a:pPr>
-              <a:spcAft>
-                <a:spcPts val="600"/>
-              </a:spcAft>
-            </a:pPr>
-            <a:r>
-              <a:rPr sz="1500">
-                <a:solidFill>
-                  <a:srgbClr val="22282E"/>
-                </a:solidFill>
-              </a:rPr>
-              <a:t>•  Brewer-Nash (Muralla China): control de acceso dinámico que cambia según el historial de accesos del sujeto para evitar conflictos de interés. Característica clave: lo permitido depende de lo ya accedido.</a:t>
-            </a:r>
-          </a:p>
-          <a:p>
-            <a:pPr>
-              <a:spcAft>
-                <a:spcPts val="600"/>
-              </a:spcAft>
-            </a:pPr>
-            <a:r>
-              <a:rPr sz="1500">
-                <a:solidFill>
-                  <a:srgbClr val="22282E"/>
-                </a:solidFill>
-              </a:rPr>
-              <a:t>•  TCB (Trusted Computing Base): conjunto de hardware, firmware y software que hace cumplir la política de seguridad. Característica clave: todo lo confiable vive dentro de la frontera de confianza; reducirla reduce la superficie de ataque.</a:t>
-            </a:r>
-          </a:p>
-          <a:p>
-            <a:pPr>
-              <a:spcAft>
-                <a:spcPts val="600"/>
-              </a:spcAft>
-            </a:pPr>
-            <a:r>
-              <a:rPr sz="1500">
-                <a:solidFill>
-                  <a:srgbClr val="22282E"/>
-                </a:solidFill>
-              </a:rPr>
-              <a:t>•  Monitor de referencia: concepto abstracto que media todo acceso de sujetos a objetos. Debe ser: a prueba de manipulación (tamperproof), siempre invocado (non-bypassable) y suficientemente pequeño para verificarse. Su implementación es el kernel de seguridad.</a:t>
+              <a:t>•  Los modelos formales explican propiedades bajo supuestos; arquitectura combina sujetos, objetos, flujos y fronteras reales.</a:t>
+            </a:r>
+          </a:p>
+          <a:p>
+            <a:pPr>
+              <a:spcAft>
+                <a:spcPts val="600"/>
+              </a:spcAft>
+            </a:pPr>
+            <a:r>
+              <a:rPr sz="1500">
+                <a:solidFill>
+                  <a:srgbClr val="22282E"/>
+                </a:solidFill>
+              </a:rPr>
+              <a:t>•  Caso razonado. Bell-LaPadula protege confidencialidad pero no resuelve integridad operacional; se combinan controles.</a:t>
             </a:r>
           </a:p>
         </p:txBody>
@@ -4286,7 +4797,7 @@
                   <a:srgbClr val="0B3D2E"/>
                 </a:solidFill>
               </a:rPr>
-              <a:t>🧰 Herramientas y preparación</a:t>
+              <a:t>📔 Glosario operativo complementario</a:t>
             </a:r>
           </a:p>
         </p:txBody>
@@ -4324,67 +4835,52 @@
                   <a:srgbClr val="22282E"/>
                 </a:solidFill>
               </a:rPr>
-              <a:t>•  Esta es una clase conceptual; el "entorno" es de análisis y modelado:</a:t>
-            </a:r>
-          </a:p>
-          <a:p>
-            <a:pPr>
-              <a:spcAft>
-                <a:spcPts val="600"/>
-              </a:spcAft>
-            </a:pPr>
-            <a:r>
-              <a:rPr sz="1500">
-                <a:solidFill>
-                  <a:srgbClr val="22282E"/>
-                </a:solidFill>
-              </a:rPr>
-              <a:t>•  Editor de diagramas: draw.io / diagrams.net o Mermaid para dibujar retículos de niveles y flujos de datos.</a:t>
-            </a:r>
-          </a:p>
-          <a:p>
-            <a:pPr>
-              <a:spcAft>
-                <a:spcPts val="600"/>
-              </a:spcAft>
-            </a:pPr>
-            <a:r>
-              <a:rPr sz="1500">
-                <a:solidFill>
-                  <a:srgbClr val="22282E"/>
-                </a:solidFill>
-              </a:rPr>
-              <a:t>•  Hoja de cálculo (LibreOffice Calc / Excel) para construir matrices de acceso sujeto × objeto.</a:t>
-            </a:r>
-          </a:p>
-          <a:p>
-            <a:pPr>
-              <a:spcAft>
-                <a:spcPts val="600"/>
-              </a:spcAft>
-            </a:pPr>
-            <a:r>
-              <a:rPr sz="1500">
-                <a:solidFill>
-                  <a:srgbClr val="22282E"/>
-                </a:solidFill>
-              </a:rPr>
-              <a:t>•  SELinux o AppArmor en una VM Linux aislada para observar MAC real: sestatus, seinfo, ls -Z muestran etiquetas tipo Bell-LaPadula/Biba en producción.</a:t>
-            </a:r>
-          </a:p>
-          <a:p>
-            <a:pPr>
-              <a:spcAft>
-                <a:spcPts val="600"/>
-              </a:spcAft>
-            </a:pPr>
-            <a:r>
-              <a:rPr sz="1500">
-                <a:solidFill>
-                  <a:srgbClr val="22282E"/>
-                </a:solidFill>
-              </a:rPr>
-              <a:t>•  Documento de referencia: ten a mano el mapa de dominios CISSP (dominio 3) para ubicar cada modelo.</a:t>
+              <a:t>•  Término — Definición</a:t>
+            </a:r>
+          </a:p>
+          <a:p>
+            <a:pPr>
+              <a:spcAft>
+                <a:spcPts val="600"/>
+              </a:spcAft>
+            </a:pPr>
+            <a:r>
+              <a:rPr sz="1500">
+                <a:solidFill>
+                  <a:srgbClr val="22282E"/>
+                </a:solidFill>
+              </a:rPr>
+              <a:t>•  Evidencia — Información cuya procedencia y relación con un criterio pueden revisarse.</a:t>
+            </a:r>
+          </a:p>
+          <a:p>
+            <a:pPr>
+              <a:spcAft>
+                <a:spcPts val="600"/>
+              </a:spcAft>
+            </a:pPr>
+            <a:r>
+              <a:rPr sz="1500">
+                <a:solidFill>
+                  <a:srgbClr val="22282E"/>
+                </a:solidFill>
+              </a:rPr>
+              <a:t>•  Supuesto — Condición declarada de la que depende una conclusión.</a:t>
+            </a:r>
+          </a:p>
+          <a:p>
+            <a:pPr>
+              <a:spcAft>
+                <a:spcPts val="600"/>
+              </a:spcAft>
+            </a:pPr>
+            <a:r>
+              <a:rPr sz="1500">
+                <a:solidFill>
+                  <a:srgbClr val="22282E"/>
+                </a:solidFill>
+              </a:rPr>
+              <a:t>•  Riesgo residual — Exposición que permanece después del tratamiento.</a:t>
             </a:r>
           </a:p>
         </p:txBody>
@@ -4435,7 +4931,7 @@
                   <a:srgbClr val="0B3D2E"/>
                 </a:solidFill>
               </a:rPr>
-              <a:t>🧪 Laboratorio guiado — Diseñar una matriz de acceso multinivel</a:t>
+              <a:t>✅ Criterio de dominio</a:t>
             </a:r>
           </a:p>
         </p:txBody>
@@ -4473,97 +4969,7 @@
                   <a:srgbClr val="22282E"/>
                 </a:solidFill>
               </a:rPr>
-              <a:t>•  Ejercicio aplicado: modelarás un sistema de gestión documental de una agencia con cuatro niveles de sensibilidad y verificarás que cumple Bell-LaPadula.</a:t>
-            </a:r>
-          </a:p>
-          <a:p>
-            <a:pPr>
-              <a:spcAft>
-                <a:spcPts val="600"/>
-              </a:spcAft>
-            </a:pPr>
-            <a:r>
-              <a:rPr sz="1500">
-                <a:solidFill>
-                  <a:srgbClr val="22282E"/>
-                </a:solidFill>
-              </a:rPr>
-              <a:t>•  Define el retículo de niveles. De menor a mayor: Público &lt; Interno &lt; Confidencial &lt; Secreto. Documenta la relación de dominancia (cada nivel domina a los inferiores).</a:t>
-            </a:r>
-          </a:p>
-          <a:p>
-            <a:pPr>
-              <a:spcAft>
-                <a:spcPts val="600"/>
-              </a:spcAft>
-            </a:pPr>
-            <a:r>
-              <a:rPr sz="1500">
-                <a:solidFill>
-                  <a:srgbClr val="22282E"/>
-                </a:solidFill>
-              </a:rPr>
-              <a:t>•  Define sujetos y su clearance. Ejemplo: Ana=Secreto, Beto=Confidencial, Carla=Interno, ServicioWeb=Público.</a:t>
-            </a:r>
-          </a:p>
-          <a:p>
-            <a:pPr>
-              <a:spcAft>
-                <a:spcPts val="600"/>
-              </a:spcAft>
-            </a:pPr>
-            <a:r>
-              <a:rPr sz="1500">
-                <a:solidFill>
-                  <a:srgbClr val="22282E"/>
-                </a:solidFill>
-              </a:rPr>
-              <a:t>•  Define objetos y su clasificación. planestrategico=Secreto, informefinanzas=Confidencial, manualrrhh=Interno, webcorp=Público.</a:t>
-            </a:r>
-          </a:p>
-          <a:p>
-            <a:pPr>
-              <a:spcAft>
-                <a:spcPts val="600"/>
-              </a:spcAft>
-            </a:pPr>
-            <a:r>
-              <a:rPr sz="1500">
-                <a:solidFill>
-                  <a:srgbClr val="22282E"/>
-                </a:solidFill>
-              </a:rPr>
-              <a:t>•  Aplica ss-property (no read up). Construye la matriz de lectura: marca ✔ solo si clearance(sujeto) ≥ clasificacion(objeto). Verifica que Beto NO puede leer planestrategico.</a:t>
-            </a:r>
-          </a:p>
-          <a:p>
-            <a:pPr>
-              <a:spcAft>
-                <a:spcPts val="600"/>
-              </a:spcAft>
-            </a:pPr>
-            <a:r>
-              <a:rPr sz="1500">
-                <a:solidFill>
-                  <a:srgbClr val="22282E"/>
-                </a:solidFill>
-              </a:rPr>
-              <a:t>•  Aplica \-property (no write down). Construye la matriz de escritura: marca ✔ solo si clearance(sujeto) ≤ clasificacion(objeto). Verifica que Ana (Secreto) NO puede escribir en webcorp (Público) —evita fuga de información.</a:t>
-            </a:r>
-          </a:p>
-          <a:p>
-            <a:pPr>
-              <a:spcAft>
-                <a:spcPts val="600"/>
-              </a:spcAft>
-            </a:pPr>
-            <a:r>
-              <a:rPr sz="1500">
-                <a:solidFill>
-                  <a:srgbClr val="22282E"/>
-                </a:solidFill>
-              </a:rPr>
-              <a:t>•  Identifica el "tranquility principle". Anota qué pasa si Beto es promovido a Secreto a mitad de sesión (strong vs weak tranquility) y por qué reetiquetar en caliente es riesgoso.</a:t>
+              <a:t>•  El alumno demuestra dominio cuando explica el diagrama, resuelve el caso con evidencia, declara límites y puede defender por qué su decisión cambia si cambia un supuesto.</a:t>
             </a:r>
           </a:p>
         </p:txBody>
@@ -4614,7 +5020,7 @@
                   <a:srgbClr val="0B3D2E"/>
                 </a:solidFill>
               </a:rPr>
-              <a:t>✍️ Ejercicios</a:t>
+              <a:t>📖 Definiciones y características</a:t>
             </a:r>
           </a:p>
         </p:txBody>
@@ -4652,82 +5058,97 @@
                   <a:srgbClr val="22282E"/>
                 </a:solidFill>
               </a:rPr>
-              <a:t>•  Dibuja el retículo de niveles de una empresa con las categorías TLP:CLEAR/GREEN/AMBER/RED y clasifica 5 documentos reales de tu organización.</a:t>
-            </a:r>
-          </a:p>
-          <a:p>
-            <a:pPr>
-              <a:spcAft>
-                <a:spcPts val="600"/>
-              </a:spcAft>
-            </a:pPr>
-            <a:r>
-              <a:rPr sz="1500">
-                <a:solidFill>
-                  <a:srgbClr val="22282E"/>
-                </a:solidFill>
-              </a:rPr>
-              <a:t>•  Dado un sujeto Confidencial y un objeto Secreto, indica qué operaciones permite BLP y cuáles Biba, y explica la diferencia.</a:t>
-            </a:r>
-          </a:p>
-          <a:p>
-            <a:pPr>
-              <a:spcAft>
-                <a:spcPts val="600"/>
-              </a:spcAft>
-            </a:pPr>
-            <a:r>
-              <a:rPr sz="1500">
-                <a:solidFill>
-                  <a:srgbClr val="22282E"/>
-                </a:solidFill>
-              </a:rPr>
-              <a:t>•  Modela con Clark-Wilson un flujo de "solicitud → aprobación → pago" identificando CDI, UDI, TP e IVP.</a:t>
-            </a:r>
-          </a:p>
-          <a:p>
-            <a:pPr>
-              <a:spcAft>
-                <a:spcPts val="600"/>
-              </a:spcAft>
-            </a:pPr>
-            <a:r>
-              <a:rPr sz="1500">
-                <a:solidFill>
-                  <a:srgbClr val="22282E"/>
-                </a:solidFill>
-              </a:rPr>
-              <a:t>•  Explica con un caso de consultoría por qué Brewer-Nash es dinámico y BLP estático.</a:t>
-            </a:r>
-          </a:p>
-          <a:p>
-            <a:pPr>
-              <a:spcAft>
-                <a:spcPts val="600"/>
-              </a:spcAft>
-            </a:pPr>
-            <a:r>
-              <a:rPr sz="1500">
-                <a:solidFill>
-                  <a:srgbClr val="22282E"/>
-                </a:solidFill>
-              </a:rPr>
-              <a:t>•  Enumera las tres propiedades del monitor de referencia y da un ejemplo de fallo real por incumplir cada una.</a:t>
-            </a:r>
-          </a:p>
-          <a:p>
-            <a:pPr>
-              <a:spcAft>
-                <a:spcPts val="600"/>
-              </a:spcAft>
-            </a:pPr>
-            <a:r>
-              <a:rPr sz="1500">
-                <a:solidFill>
-                  <a:srgbClr val="22282E"/>
-                </a:solidFill>
-              </a:rPr>
-              <a:t>•  Argumenta por qué reducir la TCB mejora la verificabilidad, usando el kernel monolítico vs microkernel como ejemplo.</a:t>
+              <a:t>•  Modelo de máquina de estados (state machine model): representa el sistema como estados y transiciones; es seguro si siempre parte de un estado seguro y toda transición conduce a otro estado seguro.…</a:t>
+            </a:r>
+          </a:p>
+          <a:p>
+            <a:pPr>
+              <a:spcAft>
+                <a:spcPts val="600"/>
+              </a:spcAft>
+            </a:pPr>
+            <a:r>
+              <a:rPr sz="1500">
+                <a:solidFill>
+                  <a:srgbClr val="22282E"/>
+                </a:solidFill>
+              </a:rPr>
+              <a:t>•  Bell-LaPadula: modelo de confidencialidad con etiquetas de sensibilidad. Propiedad de seguridad simple (ss): un sujeto no puede leer un objeto de nivel superior (no read up). Propiedad estrella (\)…</a:t>
+            </a:r>
+          </a:p>
+          <a:p>
+            <a:pPr>
+              <a:spcAft>
+                <a:spcPts val="600"/>
+              </a:spcAft>
+            </a:pPr>
+            <a:r>
+              <a:rPr sz="1500">
+                <a:solidFill>
+                  <a:srgbClr val="22282E"/>
+                </a:solidFill>
+              </a:rPr>
+              <a:t>•  Biba: modelo de integridad, dual de BLP. Simple integrity: no read down (no leer de nivel de integridad menor). \ integrity: no write up (no escribir a nivel mayor). Característica clave: evita…</a:t>
+            </a:r>
+          </a:p>
+          <a:p>
+            <a:pPr>
+              <a:spcAft>
+                <a:spcPts val="600"/>
+              </a:spcAft>
+            </a:pPr>
+            <a:r>
+              <a:rPr sz="1500">
+                <a:solidFill>
+                  <a:srgbClr val="22282E"/>
+                </a:solidFill>
+              </a:rPr>
+              <a:t>•  Clark-Wilson: integridad comercial mediante transacciones bien formadas. Usa CDI (Constrained Data Items), UDI (Unconstrained Data Items), TP (Transformation Procedures) e IVP (Integrity Verification…</a:t>
+            </a:r>
+          </a:p>
+          <a:p>
+            <a:pPr>
+              <a:spcAft>
+                <a:spcPts val="600"/>
+              </a:spcAft>
+            </a:pPr>
+            <a:r>
+              <a:rPr sz="1500">
+                <a:solidFill>
+                  <a:srgbClr val="22282E"/>
+                </a:solidFill>
+              </a:rPr>
+              <a:t>•  Brewer-Nash (Muralla China): control de acceso dinámico que cambia según el historial de accesos del sujeto para evitar conflictos de interés. Característica clave: lo permitido depende de lo ya…</a:t>
+            </a:r>
+          </a:p>
+          <a:p>
+            <a:pPr>
+              <a:spcAft>
+                <a:spcPts val="600"/>
+              </a:spcAft>
+            </a:pPr>
+            <a:r>
+              <a:rPr sz="1500">
+                <a:solidFill>
+                  <a:srgbClr val="22282E"/>
+                </a:solidFill>
+              </a:rPr>
+              <a:t>•  TCB (Trusted Computing Base): conjunto de hardware, firmware y software que hace cumplir la política de seguridad. Característica clave: todo lo confiable vive dentro de la frontera de confianza…</a:t>
+            </a:r>
+          </a:p>
+          <a:p>
+            <a:pPr>
+              <a:spcAft>
+                <a:spcPts val="600"/>
+              </a:spcAft>
+            </a:pPr>
+            <a:r>
+              <a:rPr sz="1500">
+                <a:solidFill>
+                  <a:srgbClr val="22282E"/>
+                </a:solidFill>
+              </a:rPr>
+              <a:t>•  Monitor de referencia: concepto abstracto que media todo acceso de sujetos a objetos. Debe ser: a prueba de manipulación (tamperproof), siempre invocado (non-bypassable) y suficientemente pequeño…</a:t>
             </a:r>
           </a:p>
         </p:txBody>
@@ -4778,7 +5199,7 @@
                   <a:srgbClr val="0B3D2E"/>
                 </a:solidFill>
               </a:rPr>
-              <a:t>📝 Reto verificable</a:t>
+              <a:t>🧰 Herramientas y preparación</a:t>
             </a:r>
           </a:p>
         </p:txBody>
@@ -4816,82 +5237,67 @@
                   <a:srgbClr val="22282E"/>
                 </a:solidFill>
               </a:rPr>
-              <a:t>•  Reto: entrega una matriz de acceso multinivel (lectura + escritura) para un sistema de 4 niveles y 4 sujetos que cumpla Bell-LaPadula, más una segunda versión Biba del mismo sistema.</a:t>
-            </a:r>
-          </a:p>
-          <a:p>
-            <a:pPr>
-              <a:spcAft>
-                <a:spcPts val="600"/>
-              </a:spcAft>
-            </a:pPr>
-            <a:r>
-              <a:rPr sz="1500">
-                <a:solidFill>
-                  <a:srgbClr val="22282E"/>
-                </a:solidFill>
-              </a:rPr>
-              <a:t>•  Criterio de aceptación:</a:t>
-            </a:r>
-          </a:p>
-          <a:p>
-            <a:pPr>
-              <a:spcAft>
-                <a:spcPts val="600"/>
-              </a:spcAft>
-            </a:pPr>
-            <a:r>
-              <a:rPr sz="1500">
-                <a:solidFill>
-                  <a:srgbClr val="22282E"/>
-                </a:solidFill>
-              </a:rPr>
-              <a:t>•  Ninguna celda de lectura viola no read up y ninguna de escritura viola no write down en la versión BLP.</a:t>
-            </a:r>
-          </a:p>
-          <a:p>
-            <a:pPr>
-              <a:spcAft>
-                <a:spcPts val="600"/>
-              </a:spcAft>
-            </a:pPr>
-            <a:r>
-              <a:rPr sz="1500">
-                <a:solidFill>
-                  <a:srgbClr val="22282E"/>
-                </a:solidFill>
-              </a:rPr>
-              <a:t>•  La versión Biba invierte correctamente ambas reglas.</a:t>
-            </a:r>
-          </a:p>
-          <a:p>
-            <a:pPr>
-              <a:spcAft>
-                <a:spcPts val="600"/>
-              </a:spcAft>
-            </a:pPr>
-            <a:r>
-              <a:rPr sz="1500">
-                <a:solidFill>
-                  <a:srgbClr val="22282E"/>
-                </a:solidFill>
-              </a:rPr>
-              <a:t>•  Se identifica explícitamente qué propiedad de seguridad protege cada versión.</a:t>
-            </a:r>
-          </a:p>
-          <a:p>
-            <a:pPr>
-              <a:spcAft>
-                <a:spcPts val="600"/>
-              </a:spcAft>
-            </a:pPr>
-            <a:r>
-              <a:rPr sz="1500">
-                <a:solidFill>
-                  <a:srgbClr val="22282E"/>
-                </a:solidFill>
-              </a:rPr>
-              <a:t>•  Incluye al menos un TP con separación de deberes documentada (Clark-Wilson).</a:t>
+              <a:t>•  Esta es una clase conceptual; el "entorno" es de análisis y modelado:</a:t>
+            </a:r>
+          </a:p>
+          <a:p>
+            <a:pPr>
+              <a:spcAft>
+                <a:spcPts val="600"/>
+              </a:spcAft>
+            </a:pPr>
+            <a:r>
+              <a:rPr sz="1500">
+                <a:solidFill>
+                  <a:srgbClr val="22282E"/>
+                </a:solidFill>
+              </a:rPr>
+              <a:t>•  Editor de diagramas: draw.io / diagrams.net o Mermaid para dibujar retículos de niveles y flujos de datos.</a:t>
+            </a:r>
+          </a:p>
+          <a:p>
+            <a:pPr>
+              <a:spcAft>
+                <a:spcPts val="600"/>
+              </a:spcAft>
+            </a:pPr>
+            <a:r>
+              <a:rPr sz="1500">
+                <a:solidFill>
+                  <a:srgbClr val="22282E"/>
+                </a:solidFill>
+              </a:rPr>
+              <a:t>•  Hoja de cálculo (LibreOffice Calc / Excel) para construir matrices de acceso sujeto × objeto.</a:t>
+            </a:r>
+          </a:p>
+          <a:p>
+            <a:pPr>
+              <a:spcAft>
+                <a:spcPts val="600"/>
+              </a:spcAft>
+            </a:pPr>
+            <a:r>
+              <a:rPr sz="1500">
+                <a:solidFill>
+                  <a:srgbClr val="22282E"/>
+                </a:solidFill>
+              </a:rPr>
+              <a:t>•  SELinux o AppArmor en una VM Linux aislada para observar MAC real: sestatus, seinfo, ls -Z muestran etiquetas tipo Bell-LaPadula/Biba en producción.</a:t>
+            </a:r>
+          </a:p>
+          <a:p>
+            <a:pPr>
+              <a:spcAft>
+                <a:spcPts val="600"/>
+              </a:spcAft>
+            </a:pPr>
+            <a:r>
+              <a:rPr sz="1500">
+                <a:solidFill>
+                  <a:srgbClr val="22282E"/>
+                </a:solidFill>
+              </a:rPr>
+              <a:t>•  Documento de referencia: ten a mano el mapa de dominios CISSP (dominio 3) para ubicar cada modelo.</a:t>
             </a:r>
           </a:p>
         </p:txBody>
